--- a/FinanceGuru.pptx
+++ b/FinanceGuru.pptx
@@ -5,10 +5,10 @@
     <p:sldMasterId id="2147483684" r:id="rId1"/>
   </p:sldMasterIdLst>
   <p:notesMasterIdLst>
-    <p:notesMasterId r:id="rId11"/>
+    <p:notesMasterId r:id="rId12"/>
   </p:notesMasterIdLst>
   <p:handoutMasterIdLst>
-    <p:handoutMasterId r:id="rId12"/>
+    <p:handoutMasterId r:id="rId13"/>
   </p:handoutMasterIdLst>
   <p:sldIdLst>
     <p:sldId id="272" r:id="rId2"/>
@@ -18,8 +18,9 @@
     <p:sldId id="276" r:id="rId6"/>
     <p:sldId id="277" r:id="rId7"/>
     <p:sldId id="280" r:id="rId8"/>
-    <p:sldId id="279" r:id="rId9"/>
-    <p:sldId id="278" r:id="rId10"/>
+    <p:sldId id="281" r:id="rId9"/>
+    <p:sldId id="279" r:id="rId10"/>
+    <p:sldId id="278" r:id="rId11"/>
   </p:sldIdLst>
   <p:sldSz cx="12192000" cy="6858000"/>
   <p:notesSz cx="6858000" cy="9144000"/>
@@ -211,7 +212,7 @@
           <a:p>
             <a:fld id="{FC120C13-2514-4D9C-8D4B-A10DA4FFD5A1}" type="datetime1">
               <a:rPr lang="ru-RU" smtClean="0"/>
-              <a:t>02.05.2026</a:t>
+              <a:t>03.05.2026</a:t>
             </a:fld>
             <a:endParaRPr lang="ru-RU" dirty="0"/>
           </a:p>
@@ -378,7 +379,7 @@
             <a:fld id="{B5B67CA5-ECF1-43FF-A31E-6BD9B21B57BB}" type="datetime1">
               <a:rPr lang="ru-RU" smtClean="0"/>
               <a:pPr/>
-              <a:t>02.05.2026</a:t>
+              <a:t>03.05.2026</a:t>
             </a:fld>
             <a:endParaRPr lang="ru-RU" dirty="0"/>
           </a:p>
@@ -1225,7 +1226,7 @@
             <a:pPr rtl="0"/>
             <a:fld id="{893B0CF2-7F87-4E02-A248-870047730F99}" type="slidenum">
               <a:rPr lang="ru-RU" smtClean="0"/>
-              <a:t>8</a:t>
+              <a:t>9</a:t>
             </a:fld>
             <a:endParaRPr lang="ru-RU" dirty="0"/>
           </a:p>
@@ -1310,7 +1311,7 @@
             <a:pPr rtl="0"/>
             <a:fld id="{893B0CF2-7F87-4E02-A248-870047730F99}" type="slidenum">
               <a:rPr lang="ru-RU" smtClean="0"/>
-              <a:t>9</a:t>
+              <a:t>10</a:t>
             </a:fld>
             <a:endParaRPr lang="ru-RU" dirty="0"/>
           </a:p>
@@ -1647,7 +1648,7 @@
             <a:pPr rtl="0"/>
             <a:fld id="{D1042E67-0227-4BC3-82B0-5759BC2EE067}" type="datetime1">
               <a:rPr lang="ru-RU" noProof="0" smtClean="0"/>
-              <a:t>02.05.2026</a:t>
+              <a:t>03.05.2026</a:t>
             </a:fld>
             <a:endParaRPr lang="ru-RU" noProof="0" dirty="0"/>
           </a:p>
@@ -1836,7 +1837,7 @@
             <a:pPr rtl="0"/>
             <a:fld id="{EADCC9AE-B7F3-45CB-BB2E-3222B2AEBBC3}" type="datetime1">
               <a:rPr lang="ru-RU" noProof="0" smtClean="0"/>
-              <a:t>02.05.2026</a:t>
+              <a:t>03.05.2026</a:t>
             </a:fld>
             <a:endParaRPr lang="ru-RU" noProof="0" dirty="0"/>
           </a:p>
@@ -2035,7 +2036,7 @@
             <a:pPr rtl="0"/>
             <a:fld id="{BEE58623-7ACF-43A9-B9A8-787CA2B0B620}" type="datetime1">
               <a:rPr lang="ru-RU" noProof="0" smtClean="0"/>
-              <a:t>02.05.2026</a:t>
+              <a:t>03.05.2026</a:t>
             </a:fld>
             <a:endParaRPr lang="ru-RU" noProof="0" dirty="0"/>
           </a:p>
@@ -2224,7 +2225,7 @@
             <a:pPr rtl="0"/>
             <a:fld id="{6CDEFBE7-4C1B-4778-8B46-649E4193A0B2}" type="datetime1">
               <a:rPr lang="ru-RU" noProof="0" smtClean="0"/>
-              <a:t>02.05.2026</a:t>
+              <a:t>03.05.2026</a:t>
             </a:fld>
             <a:endParaRPr lang="ru-RU" noProof="0" dirty="0"/>
           </a:p>
@@ -2476,7 +2477,7 @@
             <a:pPr rtl="0"/>
             <a:fld id="{F8CCFD91-7790-4468-A129-07AFFDDBA1C7}" type="datetime1">
               <a:rPr lang="ru-RU" noProof="0" smtClean="0"/>
-              <a:t>02.05.2026</a:t>
+              <a:t>03.05.2026</a:t>
             </a:fld>
             <a:endParaRPr lang="ru-RU" noProof="0" dirty="0"/>
           </a:p>
@@ -2764,7 +2765,7 @@
             <a:pPr rtl="0"/>
             <a:fld id="{5CE41293-93E0-46D4-A151-C6BFE1D839E4}" type="datetime1">
               <a:rPr lang="ru-RU" noProof="0" smtClean="0"/>
-              <a:t>02.05.2026</a:t>
+              <a:t>03.05.2026</a:t>
             </a:fld>
             <a:endParaRPr lang="ru-RU" noProof="0" dirty="0"/>
           </a:p>
@@ -3166,7 +3167,7 @@
             <a:pPr rtl="0"/>
             <a:fld id="{59791C00-DC62-4142-9F6D-DA1C45AB977D}" type="datetime1">
               <a:rPr lang="ru-RU" noProof="0" smtClean="0"/>
-              <a:t>02.05.2026</a:t>
+              <a:t>03.05.2026</a:t>
             </a:fld>
             <a:endParaRPr lang="ru-RU" noProof="0" dirty="0"/>
           </a:p>
@@ -3340,7 +3341,7 @@
             <a:pPr rtl="0"/>
             <a:fld id="{74395BA2-92C5-4296-B336-F8334E18CE48}" type="datetime1">
               <a:rPr lang="ru-RU" noProof="0" smtClean="0"/>
-              <a:t>02.05.2026</a:t>
+              <a:t>03.05.2026</a:t>
             </a:fld>
             <a:endParaRPr lang="ru-RU" noProof="0" dirty="0"/>
           </a:p>
@@ -3453,7 +3454,7 @@
             <a:pPr rtl="0"/>
             <a:fld id="{55DBA5C4-3A0B-44F2-A553-77BCC15D81C0}" type="datetime1">
               <a:rPr lang="ru-RU" noProof="0" smtClean="0"/>
-              <a:t>02.05.2026</a:t>
+              <a:t>03.05.2026</a:t>
             </a:fld>
             <a:endParaRPr lang="ru-RU" noProof="0" dirty="0"/>
           </a:p>
@@ -3738,7 +3739,7 @@
             <a:pPr rtl="0"/>
             <a:fld id="{6D601DC2-C9FF-4CCB-9CA8-59247185429A}" type="datetime1">
               <a:rPr lang="ru-RU" noProof="0" smtClean="0"/>
-              <a:t>02.05.2026</a:t>
+              <a:t>03.05.2026</a:t>
             </a:fld>
             <a:endParaRPr lang="ru-RU" noProof="0" dirty="0"/>
           </a:p>
@@ -4097,7 +4098,7 @@
             <a:pPr rtl="0"/>
             <a:fld id="{2900A0FC-F56C-4772-9C86-2C39F56A45E8}" type="datetime1">
               <a:rPr lang="ru-RU" noProof="0" smtClean="0"/>
-              <a:t>02.05.2026</a:t>
+              <a:t>03.05.2026</a:t>
             </a:fld>
             <a:endParaRPr lang="ru-RU" noProof="0" dirty="0"/>
           </a:p>
@@ -5135,7 +5136,7 @@
             <a:pPr rtl="0"/>
             <a:fld id="{E2826595-62FB-4CCD-B121-F144066977C5}" type="datetime1">
               <a:rPr lang="ru-RU" noProof="0" smtClean="0"/>
-              <a:t>02.05.2026</a:t>
+              <a:t>03.05.2026</a:t>
             </a:fld>
             <a:endParaRPr lang="ru-RU" noProof="0" dirty="0"/>
           </a:p>
@@ -5721,6 +5722,254 @@
 </p:sld>
 </file>
 
+<file path=ppt/slides/slide10.xml><?xml version="1.0" encoding="utf-8"?>
+<p:sld xmlns:a="http://schemas.openxmlformats.org/drawingml/2006/main" xmlns:r="http://schemas.openxmlformats.org/officeDocument/2006/relationships" xmlns:p="http://schemas.openxmlformats.org/presentationml/2006/main">
+  <p:cSld>
+    <p:spTree>
+      <p:nvGrpSpPr>
+        <p:cNvPr id="1" name=""/>
+        <p:cNvGrpSpPr/>
+        <p:nvPr/>
+      </p:nvGrpSpPr>
+      <p:grpSpPr>
+        <a:xfrm>
+          <a:off x="0" y="0"/>
+          <a:ext cx="0" cy="0"/>
+          <a:chOff x="0" y="0"/>
+          <a:chExt cx="0" cy="0"/>
+        </a:xfrm>
+      </p:grpSpPr>
+      <p:sp>
+        <p:nvSpPr>
+          <p:cNvPr id="3" name="Заголовок 2"/>
+          <p:cNvSpPr>
+            <a:spLocks noGrp="1"/>
+          </p:cNvSpPr>
+          <p:nvPr>
+            <p:ph type="title"/>
+          </p:nvPr>
+        </p:nvSpPr>
+        <p:spPr>
+          <a:xfrm>
+            <a:off x="424249" y="446903"/>
+            <a:ext cx="10972800" cy="1143000"/>
+          </a:xfrm>
+        </p:spPr>
+        <p:txBody>
+          <a:bodyPr rtlCol="0"/>
+          <a:lstStyle/>
+          <a:p>
+            <a:pPr rtl="0"/>
+            <a:r>
+              <a:rPr lang="ru-RU" dirty="0">
+                <a:solidFill>
+                  <a:srgbClr val="C00000"/>
+                </a:solidFill>
+                <a:latin typeface="+mn-lt"/>
+              </a:rPr>
+              <a:t>Итоги</a:t>
+            </a:r>
+          </a:p>
+        </p:txBody>
+      </p:sp>
+      <p:sp>
+        <p:nvSpPr>
+          <p:cNvPr id="2" name="Объект 1"/>
+          <p:cNvSpPr>
+            <a:spLocks noGrp="1"/>
+          </p:cNvSpPr>
+          <p:nvPr>
+            <p:ph idx="1"/>
+          </p:nvPr>
+        </p:nvSpPr>
+        <p:spPr>
+          <a:xfrm>
+            <a:off x="424249" y="2021977"/>
+            <a:ext cx="6347254" cy="4389120"/>
+          </a:xfrm>
+        </p:spPr>
+        <p:txBody>
+          <a:bodyPr rtlCol="0">
+            <a:normAutofit fontScale="85000" lnSpcReduction="20000"/>
+          </a:bodyPr>
+          <a:lstStyle/>
+          <a:p>
+            <a:pPr rtl="0"/>
+            <a:r>
+              <a:rPr lang="ru-RU" dirty="0"/>
+              <a:t>✅ РАБОТАЕТ ВСЁ:</a:t>
+            </a:r>
+          </a:p>
+          <a:p>
+            <a:pPr rtl="0"/>
+            <a:endParaRPr lang="ru-RU" dirty="0"/>
+          </a:p>
+          <a:p>
+            <a:pPr rtl="0"/>
+            <a:r>
+              <a:rPr lang="ru-RU" dirty="0"/>
+              <a:t>🤖 Умный чат-бот</a:t>
+            </a:r>
+          </a:p>
+          <a:p>
+            <a:pPr rtl="0"/>
+            <a:endParaRPr lang="ru-RU" dirty="0"/>
+          </a:p>
+          <a:p>
+            <a:pPr rtl="0"/>
+            <a:r>
+              <a:rPr lang="ru-RU" dirty="0"/>
+              <a:t>💰 Курсы валют</a:t>
+            </a:r>
+          </a:p>
+          <a:p>
+            <a:pPr rtl="0"/>
+            <a:endParaRPr lang="ru-RU" dirty="0"/>
+          </a:p>
+          <a:p>
+            <a:pPr rtl="0"/>
+            <a:r>
+              <a:rPr lang="ru-RU" dirty="0"/>
+              <a:t>💱 Конвертер (9 валют)</a:t>
+            </a:r>
+          </a:p>
+          <a:p>
+            <a:pPr rtl="0"/>
+            <a:endParaRPr lang="ru-RU" dirty="0"/>
+          </a:p>
+          <a:p>
+            <a:pPr rtl="0"/>
+            <a:r>
+              <a:rPr lang="ru-RU" dirty="0"/>
+              <a:t>🧮 Калькулятор вклада</a:t>
+            </a:r>
+          </a:p>
+          <a:p>
+            <a:pPr rtl="0"/>
+            <a:endParaRPr lang="ru-RU" dirty="0"/>
+          </a:p>
+          <a:p>
+            <a:pPr rtl="0"/>
+            <a:r>
+              <a:rPr lang="ru-RU" dirty="0"/>
+              <a:t>📝 Пользовательские статьи</a:t>
+            </a:r>
+          </a:p>
+          <a:p>
+            <a:pPr rtl="0"/>
+            <a:endParaRPr lang="ru-RU" dirty="0"/>
+          </a:p>
+          <a:p>
+            <a:pPr rtl="0"/>
+            <a:r>
+              <a:rPr lang="ru-RU" dirty="0"/>
+              <a:t>🔐 Вход</a:t>
+            </a:r>
+            <a:r>
+              <a:rPr lang="en-US" dirty="0"/>
+              <a:t>, </a:t>
+            </a:r>
+            <a:r>
+              <a:rPr lang="ru-RU" dirty="0"/>
+              <a:t>регистрация, </a:t>
+            </a:r>
+            <a:r>
+              <a:rPr lang="en-US" dirty="0"/>
+              <a:t>“</a:t>
+            </a:r>
+            <a:r>
+              <a:rPr lang="ru-RU" dirty="0"/>
+              <a:t>забыли пароль</a:t>
+            </a:r>
+            <a:r>
+              <a:rPr lang="en-US" dirty="0"/>
+              <a:t>”</a:t>
+            </a:r>
+            <a:endParaRPr lang="ru-RU" dirty="0"/>
+          </a:p>
+        </p:txBody>
+      </p:sp>
+      <p:sp>
+        <p:nvSpPr>
+          <p:cNvPr id="5" name="TextBox 4">
+            <a:extLst>
+              <a:ext uri="{FF2B5EF4-FFF2-40B4-BE49-F238E27FC236}">
+                <a16:creationId xmlns:a16="http://schemas.microsoft.com/office/drawing/2014/main" id="{0E6FF675-7D41-A335-1C6A-561B3CBCAA32}"/>
+              </a:ext>
+            </a:extLst>
+          </p:cNvPr>
+          <p:cNvSpPr txBox="1"/>
+          <p:nvPr/>
+        </p:nvSpPr>
+        <p:spPr>
+          <a:xfrm>
+            <a:off x="4780007" y="1947836"/>
+            <a:ext cx="7411993" cy="1785104"/>
+          </a:xfrm>
+          <a:prstGeom prst="rect">
+            <a:avLst/>
+          </a:prstGeom>
+          <a:noFill/>
+          <a:ln>
+            <a:noFill/>
+          </a:ln>
+        </p:spPr>
+        <p:txBody>
+          <a:bodyPr wrap="square">
+            <a:spAutoFit/>
+          </a:bodyPr>
+          <a:lstStyle/>
+          <a:p>
+            <a:r>
+              <a:rPr lang="ru-RU" sz="2200" dirty="0"/>
+              <a:t>🎯 УНИКАЛЬНОСТЬ ПРОЕКТА:</a:t>
+            </a:r>
+          </a:p>
+          <a:p>
+            <a:endParaRPr lang="ru-RU" sz="2200" dirty="0"/>
+          </a:p>
+          <a:p>
+            <a:r>
+              <a:rPr lang="ru-RU" sz="2200" dirty="0"/>
+              <a:t>"Ретро-дизайн 2007 года + современные AI-технологии"</a:t>
+            </a:r>
+          </a:p>
+          <a:p>
+            <a:endParaRPr lang="ru-RU" sz="2200" dirty="0"/>
+          </a:p>
+          <a:p>
+            <a:r>
+              <a:rPr lang="ru-RU" sz="2200" dirty="0"/>
+              <a:t>➕ Использованы все изученные технологии</a:t>
+            </a:r>
+          </a:p>
+        </p:txBody>
+      </p:sp>
+    </p:spTree>
+    <p:extLst>
+      <p:ext uri="{BB962C8B-B14F-4D97-AF65-F5344CB8AC3E}">
+        <p14:creationId xmlns:p14="http://schemas.microsoft.com/office/powerpoint/2010/main" val="2054880847"/>
+      </p:ext>
+    </p:extLst>
+  </p:cSld>
+  <p:clrMapOvr>
+    <a:masterClrMapping/>
+  </p:clrMapOvr>
+  <mc:AlternateContent xmlns:mc="http://schemas.openxmlformats.org/markup-compatibility/2006" xmlns:p14="http://schemas.microsoft.com/office/powerpoint/2010/main">
+    <mc:Choice Requires="p14">
+      <p:transition spd="med" p14:dur="700">
+        <p:fade/>
+      </p:transition>
+    </mc:Choice>
+    <mc:Fallback xmlns="">
+      <p:transition spd="med">
+        <p:fade/>
+      </p:transition>
+    </mc:Fallback>
+  </mc:AlternateContent>
+</p:sld>
+</file>
+
 <file path=ppt/slides/slide2.xml><?xml version="1.0" encoding="utf-8"?>
 <p:sld xmlns:a="http://schemas.openxmlformats.org/drawingml/2006/main" xmlns:r="http://schemas.openxmlformats.org/officeDocument/2006/relationships" xmlns:p="http://schemas.openxmlformats.org/presentationml/2006/main">
   <p:cSld>
@@ -5917,7 +6166,7 @@
                 </a:solidFill>
                 <a:latin typeface="+mn-lt"/>
               </a:rPr>
-              <a:t>     Что делает Бот</a:t>
+              <a:t>     Что делает </a:t>
             </a:r>
             <a:r>
               <a:rPr lang="en-US" dirty="0">
@@ -5926,7 +6175,25 @@
                 </a:solidFill>
                 <a:latin typeface="+mn-lt"/>
               </a:rPr>
-              <a:t>?</a:t>
+              <a:t>“</a:t>
+            </a:r>
+            <a:r>
+              <a:rPr lang="ru-RU" dirty="0">
+                <a:solidFill>
+                  <a:srgbClr val="C00000"/>
+                </a:solidFill>
+                <a:latin typeface="+mn-lt"/>
+              </a:rPr>
+              <a:t>Бот</a:t>
+            </a:r>
+            <a:r>
+              <a:rPr lang="en-US" dirty="0">
+                <a:solidFill>
+                  <a:srgbClr val="C00000"/>
+                </a:solidFill>
+                <a:latin typeface="+mn-lt"/>
+              </a:rPr>
+              <a:t>”?</a:t>
             </a:r>
             <a:endParaRPr lang="ru-RU" dirty="0">
               <a:solidFill>
@@ -5972,8 +6239,13 @@
             </a:r>
             <a:r>
               <a:rPr lang="ru-RU" sz="2800" dirty="0"/>
-              <a:t>-чат, который даёт советы по деньгам</a:t>
-            </a:r>
+              <a:t>-чат, который даёт советы </a:t>
+            </a:r>
+            <a:r>
+              <a:rPr lang="ru-RU" sz="2800"/>
+              <a:t>по финансам</a:t>
+            </a:r>
+            <a:endParaRPr lang="ru-RU" sz="2800" dirty="0"/>
           </a:p>
         </p:txBody>
       </p:sp>
@@ -7407,7 +7679,13 @@
       </p:grpSpPr>
       <p:sp>
         <p:nvSpPr>
-          <p:cNvPr id="3" name="Заголовок 2"/>
+          <p:cNvPr id="2" name="Заголовок 1">
+            <a:extLst>
+              <a:ext uri="{FF2B5EF4-FFF2-40B4-BE49-F238E27FC236}">
+                <a16:creationId xmlns:a16="http://schemas.microsoft.com/office/drawing/2014/main" id="{AE201300-A14A-4E50-93C3-A41BB2583375}"/>
+              </a:ext>
+            </a:extLst>
+          </p:cNvPr>
           <p:cNvSpPr>
             <a:spLocks noGrp="1"/>
           </p:cNvSpPr>
@@ -7417,25 +7695,31 @@
         </p:nvSpPr>
         <p:spPr/>
         <p:txBody>
-          <a:bodyPr rtlCol="0"/>
-          <a:lstStyle/>
-          <a:p>
-            <a:pPr rtl="0"/>
-            <a:r>
-              <a:rPr lang="ru-RU" dirty="0">
+          <a:bodyPr/>
+          <a:lstStyle/>
+          <a:p>
+            <a:r>
+              <a:rPr lang="ru-RU" sz="4800" dirty="0">
                 <a:solidFill>
                   <a:srgbClr val="C00000"/>
                 </a:solidFill>
                 <a:latin typeface="+mn-lt"/>
               </a:rPr>
-              <a:t>Планы по улучшению </a:t>
-            </a:r>
-          </a:p>
-        </p:txBody>
-      </p:sp>
-      <p:sp>
-        <p:nvSpPr>
-          <p:cNvPr id="2" name="Объект 1"/>
+              <a:t>Секретные команды для Бота</a:t>
+            </a:r>
+            <a:endParaRPr lang="ru-RU" dirty="0"/>
+          </a:p>
+        </p:txBody>
+      </p:sp>
+      <p:sp>
+        <p:nvSpPr>
+          <p:cNvPr id="3" name="Объект 2">
+            <a:extLst>
+              <a:ext uri="{FF2B5EF4-FFF2-40B4-BE49-F238E27FC236}">
+                <a16:creationId xmlns:a16="http://schemas.microsoft.com/office/drawing/2014/main" id="{AF54E7C3-D8DB-4B3B-B37C-96DBDEBE1F09}"/>
+              </a:ext>
+            </a:extLst>
+          </p:cNvPr>
           <p:cNvSpPr>
             <a:spLocks noGrp="1"/>
           </p:cNvSpPr>
@@ -7443,45 +7727,44 @@
             <p:ph idx="1"/>
           </p:nvPr>
         </p:nvSpPr>
-        <p:spPr>
-          <a:xfrm>
-            <a:off x="609600" y="2386502"/>
-            <a:ext cx="10972800" cy="4389120"/>
-          </a:xfrm>
-        </p:spPr>
-        <p:txBody>
-          <a:bodyPr rtlCol="0">
-            <a:normAutofit/>
-          </a:bodyPr>
-          <a:lstStyle/>
-          <a:p>
-            <a:r>
-              <a:rPr lang="ru-RU" sz="3000" dirty="0"/>
-              <a:t>Голосовой ввод</a:t>
-            </a:r>
-          </a:p>
-          <a:p>
-            <a:r>
-              <a:rPr lang="ru-RU" sz="3000" dirty="0"/>
-              <a:t>Графики</a:t>
-            </a:r>
-          </a:p>
-          <a:p>
-            <a:r>
-              <a:rPr lang="ru-RU" sz="3000" dirty="0"/>
-              <a:t>Криптовалюты</a:t>
-            </a:r>
-          </a:p>
-          <a:p>
-            <a:r>
-              <a:rPr lang="ru-RU" sz="3000" dirty="0"/>
-              <a:t>Кредитный калькулятор</a:t>
-            </a:r>
-          </a:p>
-          <a:p>
-            <a:r>
-              <a:rPr lang="ru-RU" sz="3000" dirty="0"/>
-              <a:t>Восстановление пароля</a:t>
+        <p:spPr/>
+        <p:txBody>
+          <a:bodyPr/>
+          <a:lstStyle/>
+          <a:p>
+            <a:r>
+              <a:rPr lang="ru-RU" dirty="0"/>
+              <a:t>Привет, бот</a:t>
+            </a:r>
+          </a:p>
+          <a:p>
+            <a:r>
+              <a:rPr lang="ru-RU" dirty="0"/>
+              <a:t>Сделай мне сайт</a:t>
+            </a:r>
+          </a:p>
+          <a:p>
+            <a:r>
+              <a:rPr lang="ru-RU" dirty="0"/>
+              <a:t>Аська</a:t>
+            </a:r>
+          </a:p>
+          <a:p>
+            <a:r>
+              <a:rPr lang="ru-RU" dirty="0"/>
+              <a:t>Любимый фильм</a:t>
+            </a:r>
+          </a:p>
+          <a:p>
+            <a:r>
+              <a:rPr lang="ru-RU" dirty="0"/>
+              <a:t>Сколько у тебя денег</a:t>
+            </a:r>
+          </a:p>
+          <a:p>
+            <a:r>
+              <a:rPr lang="ru-RU" dirty="0"/>
+              <a:t>Секрет</a:t>
             </a:r>
           </a:p>
         </p:txBody>
@@ -7489,7 +7772,7 @@
     </p:spTree>
     <p:extLst>
       <p:ext uri="{BB962C8B-B14F-4D97-AF65-F5344CB8AC3E}">
-        <p14:creationId xmlns:p14="http://schemas.microsoft.com/office/powerpoint/2010/main" val="112606551"/>
+        <p14:creationId xmlns:p14="http://schemas.microsoft.com/office/powerpoint/2010/main" val="1109309026"/>
       </p:ext>
     </p:extLst>
   </p:cSld>
@@ -7538,12 +7821,7 @@
             <p:ph type="title"/>
           </p:nvPr>
         </p:nvSpPr>
-        <p:spPr>
-          <a:xfrm>
-            <a:off x="424249" y="446903"/>
-            <a:ext cx="10972800" cy="1143000"/>
-          </a:xfrm>
-        </p:spPr>
+        <p:spPr/>
         <p:txBody>
           <a:bodyPr rtlCol="0"/>
           <a:lstStyle/>
@@ -7556,7 +7834,7 @@
                 </a:solidFill>
                 <a:latin typeface="+mn-lt"/>
               </a:rPr>
-              <a:t>Итоги</a:t>
+              <a:t>Планы по улучшению </a:t>
             </a:r>
           </a:p>
         </p:txBody>
@@ -7573,142 +7851,43 @@
         </p:nvSpPr>
         <p:spPr>
           <a:xfrm>
-            <a:off x="424249" y="2021977"/>
-            <a:ext cx="6347254" cy="4389120"/>
+            <a:off x="609600" y="2386502"/>
+            <a:ext cx="10972800" cy="4389120"/>
           </a:xfrm>
         </p:spPr>
         <p:txBody>
           <a:bodyPr rtlCol="0">
-            <a:normAutofit fontScale="85000" lnSpcReduction="20000"/>
+            <a:normAutofit/>
           </a:bodyPr>
           <a:lstStyle/>
           <a:p>
-            <a:pPr rtl="0"/>
-            <a:r>
-              <a:rPr lang="ru-RU" dirty="0"/>
-              <a:t>✅ РАБОТАЕТ ВСЁ:</a:t>
-            </a:r>
-          </a:p>
-          <a:p>
-            <a:pPr rtl="0"/>
-            <a:endParaRPr lang="ru-RU" dirty="0"/>
-          </a:p>
-          <a:p>
-            <a:pPr rtl="0"/>
-            <a:r>
-              <a:rPr lang="ru-RU" dirty="0"/>
-              <a:t>🤖 Умный бот-советник</a:t>
-            </a:r>
-          </a:p>
-          <a:p>
-            <a:pPr rtl="0"/>
-            <a:endParaRPr lang="ru-RU" dirty="0"/>
-          </a:p>
-          <a:p>
-            <a:pPr rtl="0"/>
-            <a:r>
-              <a:rPr lang="ru-RU" dirty="0"/>
-              <a:t>💰 Курсы валют</a:t>
-            </a:r>
-          </a:p>
-          <a:p>
-            <a:pPr rtl="0"/>
-            <a:endParaRPr lang="ru-RU" dirty="0"/>
-          </a:p>
-          <a:p>
-            <a:pPr rtl="0"/>
-            <a:r>
-              <a:rPr lang="ru-RU" dirty="0"/>
-              <a:t>💱 Конвертер (9 валют)</a:t>
-            </a:r>
-          </a:p>
-          <a:p>
-            <a:pPr rtl="0"/>
-            <a:endParaRPr lang="ru-RU" dirty="0"/>
-          </a:p>
-          <a:p>
-            <a:pPr rtl="0"/>
-            <a:r>
-              <a:rPr lang="ru-RU" dirty="0"/>
-              <a:t>🧮 Калькулятор вклада</a:t>
-            </a:r>
-          </a:p>
-          <a:p>
-            <a:pPr rtl="0"/>
-            <a:endParaRPr lang="ru-RU" dirty="0"/>
-          </a:p>
-          <a:p>
-            <a:pPr rtl="0"/>
-            <a:r>
-              <a:rPr lang="ru-RU" dirty="0"/>
-              <a:t>📝 Пользовательские статьи</a:t>
-            </a:r>
-          </a:p>
-          <a:p>
-            <a:pPr rtl="0"/>
-            <a:endParaRPr lang="ru-RU" dirty="0"/>
-          </a:p>
-          <a:p>
-            <a:pPr rtl="0"/>
-            <a:r>
-              <a:rPr lang="ru-RU" dirty="0"/>
-              <a:t>🔐 Вход и регистрация</a:t>
-            </a:r>
-          </a:p>
-        </p:txBody>
-      </p:sp>
-      <p:sp>
-        <p:nvSpPr>
-          <p:cNvPr id="5" name="TextBox 4">
-            <a:extLst>
-              <a:ext uri="{FF2B5EF4-FFF2-40B4-BE49-F238E27FC236}">
-                <a16:creationId xmlns:a16="http://schemas.microsoft.com/office/drawing/2014/main" id="{0E6FF675-7D41-A335-1C6A-561B3CBCAA32}"/>
-              </a:ext>
-            </a:extLst>
-          </p:cNvPr>
-          <p:cNvSpPr txBox="1"/>
-          <p:nvPr/>
-        </p:nvSpPr>
-        <p:spPr>
-          <a:xfrm>
-            <a:off x="4780007" y="1947836"/>
-            <a:ext cx="7411993" cy="1785104"/>
-          </a:xfrm>
-          <a:prstGeom prst="rect">
-            <a:avLst/>
-          </a:prstGeom>
-          <a:noFill/>
-          <a:ln>
-            <a:noFill/>
-          </a:ln>
-        </p:spPr>
-        <p:txBody>
-          <a:bodyPr wrap="square">
-            <a:spAutoFit/>
-          </a:bodyPr>
-          <a:lstStyle/>
-          <a:p>
-            <a:r>
-              <a:rPr lang="ru-RU" sz="2200" dirty="0"/>
-              <a:t>🎯 УНИКАЛЬНОСТЬ ПРОЕКТА:</a:t>
-            </a:r>
-          </a:p>
-          <a:p>
-            <a:endParaRPr lang="ru-RU" sz="2200" dirty="0"/>
-          </a:p>
-          <a:p>
-            <a:r>
-              <a:rPr lang="ru-RU" sz="2200" dirty="0"/>
-              <a:t>"Ретро-дизайн 2007 года + современные AI-технологии"</a:t>
-            </a:r>
-          </a:p>
-          <a:p>
-            <a:endParaRPr lang="ru-RU" sz="2200" dirty="0"/>
-          </a:p>
-          <a:p>
-            <a:r>
-              <a:rPr lang="ru-RU" sz="2200" dirty="0"/>
-              <a:t>➕ Использованы все изученные технологии</a:t>
+            <a:r>
+              <a:rPr lang="ru-RU" sz="3000" dirty="0"/>
+              <a:t>Голосовой ввод</a:t>
+            </a:r>
+          </a:p>
+          <a:p>
+            <a:r>
+              <a:rPr lang="ru-RU" sz="3000" dirty="0"/>
+              <a:t>Графики</a:t>
+            </a:r>
+          </a:p>
+          <a:p>
+            <a:r>
+              <a:rPr lang="ru-RU" sz="3000" dirty="0"/>
+              <a:t>Криптовалюты</a:t>
+            </a:r>
+          </a:p>
+          <a:p>
+            <a:r>
+              <a:rPr lang="ru-RU" sz="3000" dirty="0"/>
+              <a:t>Кредитный калькулятор</a:t>
+            </a:r>
+          </a:p>
+          <a:p>
+            <a:r>
+              <a:rPr lang="ru-RU" sz="3000" dirty="0"/>
+              <a:t>Восстановление пароля</a:t>
             </a:r>
           </a:p>
         </p:txBody>
@@ -7716,7 +7895,7 @@
     </p:spTree>
     <p:extLst>
       <p:ext uri="{BB962C8B-B14F-4D97-AF65-F5344CB8AC3E}">
-        <p14:creationId xmlns:p14="http://schemas.microsoft.com/office/powerpoint/2010/main" val="2054880847"/>
+        <p14:creationId xmlns:p14="http://schemas.microsoft.com/office/powerpoint/2010/main" val="112606551"/>
       </p:ext>
     </p:extLst>
   </p:cSld>
